--- a/docs/doc_a_soumetre_pour_hackathon/fr/04_presentation_kwatsur.pptx
+++ b/docs/doc_a_soumetre_pour_hackathon/fr/04_presentation_kwatsur.pptx
@@ -1,6 +1,6 @@
 
 <file path=ppt/presentation.xml><?xml version="1.0" encoding="utf-8"?>
-<p:presentation xmlns:a="http://schemas.openxmlformats.org/drawingml/2006/main" xmlns:r="http://schemas.openxmlformats.org/officeDocument/2006/relationships" xmlns:p="http://schemas.openxmlformats.org/presentationml/2006/main" saveSubsetFonts="1" autoCompressPictures="0">
+<p:presentation xmlns:a="http://schemas.openxmlformats.org/drawingml/2006/main" xmlns:ns3="http://schemas.microsoft.com/office/powerpoint/2010/main" xmlns:ns4="http://schemas.microsoft.com/office/powerpoint/2012/main" xmlns:p="http://schemas.openxmlformats.org/presentationml/2006/main" xmlns:r="http://schemas.openxmlformats.org/officeDocument/2006/relationships" saveSubsetFonts="1" autoCompressPictures="0">
   <p:sldMasterIdLst>
     <p:sldMasterId id="2147483648" r:id="rId1"/>
   </p:sldMasterIdLst>
@@ -14,6 +14,8 @@
     <p:sldId id="262" r:id="rId8"/>
     <p:sldId id="263" r:id="rId9"/>
     <p:sldId id="264" r:id="rId10"/>
+    <p:sldId id="267" r:id="rId18"/>
+    <p:sldId id="268" r:id="rId19"/>
     <p:sldId id="265" r:id="rId11"/>
     <p:sldId id="266" r:id="rId12"/>
   </p:sldIdLst>
@@ -116,42 +118,42 @@
   </p:defaultTextStyle>
   <p:extLst>
     <p:ext uri="{521415D9-36F7-43E2-AB2F-B90AF26B5E84}">
-      <p14:sectionLst xmlns:p14="http://schemas.microsoft.com/office/powerpoint/2010/main">
-        <p14:section name="Introduction" id="{d777ffe2-4fc0-facd-b855-994f5a44dd44}">
-          <p14:sldIdLst>
-            <p14:sldId id="256"/>
-          </p14:sldIdLst>
-        </p14:section>
-        <p14:section name="Problème et solution" id="{568fe976-ec41-65d9-2164-fda718844c8f}">
-          <p14:sldIdLst>
-            <p14:sldId id="257"/>
-            <p14:sldId id="258"/>
-          </p14:sldIdLst>
-        </p14:section>
-        <p14:section name="Architecture" id="{db9d9445-f8f8-9883-d6c5-428bdf651ea6}">
-          <p14:sldIdLst>
-            <p14:sldId id="259"/>
-            <p14:sldId id="260"/>
-          </p14:sldIdLst>
-        </p14:section>
-        <p14:section name="Technologies sponsors" id="{58713a76-65da-a024-2f4d-fd0c7b312ce2}">
-          <p14:sldIdLst>
-            <p14:sldId id="261"/>
-            <p14:sldId id="262"/>
-            <p14:sldId id="263"/>
-          </p14:sldIdLst>
-        </p14:section>
-        <p14:section name="Produit et suite" id="{058a1c2a-4551-191d-d071-6e273274b1b3}">
-          <p14:sldIdLst>
-            <p14:sldId id="264"/>
-            <p14:sldId id="265"/>
-            <p14:sldId id="266"/>
-          </p14:sldIdLst>
-        </p14:section>
-      </p14:sectionLst>
+      <ns3:sectionLst>
+        <ns3:section name="Introduction" id="{d777ffe2-4fc0-facd-b855-994f5a44dd44}">
+          <ns3:sldIdLst>
+            <ns3:sldId id="256"/>
+          </ns3:sldIdLst>
+        </ns3:section>
+        <ns3:section name="Problème et solution" id="{568fe976-ec41-65d9-2164-fda718844c8f}">
+          <ns3:sldIdLst>
+            <ns3:sldId id="257"/>
+            <ns3:sldId id="258"/>
+          </ns3:sldIdLst>
+        </ns3:section>
+        <ns3:section name="Architecture" id="{db9d9445-f8f8-9883-d6c5-428bdf651ea6}">
+          <ns3:sldIdLst>
+            <ns3:sldId id="259"/>
+            <ns3:sldId id="260"/>
+          </ns3:sldIdLst>
+        </ns3:section>
+        <ns3:section name="Technologies sponsors" id="{58713a76-65da-a024-2f4d-fd0c7b312ce2}">
+          <ns3:sldIdLst>
+            <ns3:sldId id="261"/>
+            <ns3:sldId id="262"/>
+            <ns3:sldId id="263"/>
+          </ns3:sldIdLst>
+        </ns3:section>
+        <ns3:section name="Produit et suite" id="{058a1c2a-4551-191d-d071-6e273274b1b3}">
+          <ns3:sldIdLst>
+            <ns3:sldId id="264"/>
+            <ns3:sldId id="265"/>
+            <ns3:sldId id="266"/>
+          </ns3:sldIdLst>
+        </ns3:section>
+      </ns3:sectionLst>
     </p:ext>
     <p:ext uri="{EFAFB233-063F-42B5-8137-9DF3F51BA10A}">
-      <p15:sldGuideLst xmlns:p15="http://schemas.microsoft.com/office/powerpoint/2012/main"/>
+      <ns4:sldGuideLst/>
     </p:ext>
   </p:extLst>
 </p:presentation>
@@ -2343,7 +2345,7 @@
 </file>
 
 <file path=ppt/slides/slide10.xml><?xml version="1.0" encoding="utf-8"?>
-<p:sld xmlns:a="http://schemas.openxmlformats.org/drawingml/2006/main" xmlns:r="http://schemas.openxmlformats.org/officeDocument/2006/relationships" xmlns:p="http://schemas.openxmlformats.org/presentationml/2006/main">
+<p:sld xmlns:a="http://schemas.openxmlformats.org/drawingml/2006/main" xmlns:ns2="http://schemas.microsoft.com/office/mac/drawingml/2011/main" xmlns:p="http://schemas.openxmlformats.org/presentationml/2006/main">
   <p:cSld name="Slide 10">
     <p:spTree>
       <p:nvGrpSpPr>
@@ -3326,7 +3328,7 @@
           </a:prstGeom>
           <a:extLst>
             <a:ext uri="{C572A759-6A51-4108-AA02-DFA0A04FC94B}">
-              <ma14:wrappingTextBoxFlag xmlns:ma14="http://schemas.microsoft.com/office/mac/drawingml/2011/main" val="0"/>
+              <ns2:wrappingTextBoxFlag val="0"/>
             </a:ext>
           </a:extLst>
         </p:spPr>
@@ -3348,7 +3350,7 @@
             <a:pPr algn="r"/>
             <a:fld id="{F7021451-1387-4CA6-816F-3879F97B5CBC}" type="slidenum">
               <a:rPr b="0" lang="en-US"/>
-              <a:t>10</a:t>
+              <a:t>12</a:t>
             </a:fld>
             <a:endParaRPr lang="en-US"/>
           </a:p>
@@ -3363,7 +3365,7 @@
 </file>
 
 <file path=ppt/slides/slide11.xml><?xml version="1.0" encoding="utf-8"?>
-<p:sld xmlns:a="http://schemas.openxmlformats.org/drawingml/2006/main" xmlns:r="http://schemas.openxmlformats.org/officeDocument/2006/relationships" xmlns:p="http://schemas.openxmlformats.org/presentationml/2006/main">
+<p:sld xmlns:a="http://schemas.openxmlformats.org/drawingml/2006/main" xmlns:p="http://schemas.openxmlformats.org/presentationml/2006/main" xmlns:r="http://schemas.openxmlformats.org/officeDocument/2006/relationships">
   <p:cSld name="Slide 11">
     <p:spTree>
       <p:nvGrpSpPr>
@@ -3455,7 +3457,7 @@
                 <a:ea typeface="Calibri" pitchFamily="34" charset="-122"/>
                 <a:cs typeface="Calibri" pitchFamily="34" charset="-120"/>
               </a:rPr>
-              <a:t>Kwatsur cherche, vérifie et explique, sans jamais inventer.</a:t>
+              <a:t>Kwatsur cherche, explique et signale les informations à vérifier.</a:t>
             </a:r>
             <a:endParaRPr lang="en-US" sz="2400" dirty="0"/>
           </a:p>
@@ -3582,9 +3584,363 @@
                 <a:ea typeface="Calibri" pitchFamily="34" charset="-122"/>
                 <a:cs typeface="Calibri" pitchFamily="34" charset="-120"/>
               </a:rPr>
-              <a:t>Démarrage : docker compose up --build  ·  repli sans service externe : SAMPLE_MODE=true</a:t>
+              <a:t>Backend et frontend : deux Docker Compose. Interface : 8080. Mode hors services : SAMPLE_MODE=true.</a:t>
             </a:r>
             <a:endParaRPr lang="en-US" sz="1400" dirty="0"/>
+          </a:p>
+        </p:txBody>
+      </p:sp>
+    </p:spTree>
+  </p:cSld>
+  <p:clrMapOvr>
+    <a:masterClrMapping/>
+  </p:clrMapOvr>
+</p:sld>
+</file>
+
+<file path=ppt/slides/slide12.xml><?xml version="1.0" encoding="utf-8"?>
+<p:sld xmlns:a="http://schemas.openxmlformats.org/drawingml/2006/main" xmlns:ns3="http://schemas.microsoft.com/office/mac/drawingml/2011/main" xmlns:p="http://schemas.openxmlformats.org/presentationml/2006/main" xmlns:r="http://schemas.openxmlformats.org/officeDocument/2006/relationships">
+  <p:cSld name="Slide 9">
+    <p:spTree>
+      <p:nvGrpSpPr>
+        <p:cNvPr id="1" name=""/>
+        <p:cNvGrpSpPr/>
+        <p:nvPr/>
+      </p:nvGrpSpPr>
+      <p:grpSpPr>
+        <a:xfrm>
+          <a:off x="0" y="0"/>
+          <a:ext cx="0" cy="0"/>
+          <a:chOff x="0" y="0"/>
+          <a:chExt cx="0" cy="0"/>
+        </a:xfrm>
+      </p:grpSpPr>
+      <p:sp>
+        <p:nvSpPr>
+          <p:cNvPr id="2" name="Text 0"/>
+          <p:cNvSpPr/>
+          <p:nvPr>
+            <p:ph idx="100" type="title" hasCustomPrompt="1"/>
+          </p:nvPr>
+        </p:nvSpPr>
+        <p:spPr>
+          <a:xfrm>
+            <a:off x="548640" y="411480"/>
+            <a:ext cx="11094415" cy="822960"/>
+          </a:xfrm>
+          <a:prstGeom prst="rect">
+            <a:avLst/>
+          </a:prstGeom>
+          <a:noFill/>
+          <a:ln/>
+        </p:spPr>
+        <p:txBody>
+          <a:bodyPr wrap="square" lIns="0" tIns="0" rIns="0" bIns="0" rtlCol="0" anchor="ctr"/>
+          <a:lstStyle/>
+          <a:p>
+            <a:pPr algn="l" indent="0" marL="0">
+              <a:buNone/>
+            </a:pPr>
+            <a:r>
+              <a:rPr lang="en-US" sz="3400" b="1" dirty="0">
+                <a:solidFill>
+                  <a:schemeClr val="tx1"/>
+                </a:solidFill>
+                <a:latin typeface="Arial" pitchFamily="34" charset="0"/>
+                <a:ea typeface="Arial" pitchFamily="34" charset="-122"/>
+                <a:cs typeface="Arial" pitchFamily="34" charset="-120"/>
+              </a:rPr>
+              <a:t>Proposer un logement : confirmation en attente</a:t>
+            </a:r>
+            <a:endParaRPr lang="en-US" sz="3400" dirty="0"/>
+          </a:p>
+        </p:txBody>
+      </p:sp>
+      <p:pic>
+        <p:nvPicPr>
+          <p:cNvPr id="3" name="Résultats de recherche" descr="Résultats de Kwatsur : carte d'annonce avec photo d'exemple étiquetée, loyer et équipements">    </p:cNvPr>
+          <p:cNvPicPr>
+            <a:picLocks noChangeAspect="1"/>
+          </p:cNvPicPr>
+          <p:nvPr/>
+        </p:nvPicPr>
+        <p:blipFill>
+          <a:blip r:embed="rId1"/>
+          <a:stretch>
+            <a:fillRect/>
+          </a:stretch>
+        </p:blipFill>
+        <p:spPr>
+          <a:xfrm>
+            <a:off x="548640" y="1270000"/>
+            <a:ext cx="11094415" cy="4250000"/>
+          </a:xfrm>
+          <a:prstGeom prst="rect">
+            <a:avLst/>
+          </a:prstGeom>
+        </p:spPr>
+      </p:pic>
+      <p:sp>
+        <p:nvSpPr>
+          <p:cNvPr id="5" name="Text 1"/>
+          <p:cNvSpPr txBox="1"/>
+          <p:nvPr/>
+        </p:nvSpPr>
+        <p:spPr>
+          <a:xfrm>
+            <a:off x="548640" y="5580000"/>
+            <a:ext cx="11094415" cy="640080"/>
+          </a:xfrm>
+          <a:prstGeom prst="rect">
+            <a:avLst/>
+          </a:prstGeom>
+          <a:noFill/>
+          <a:ln/>
+        </p:spPr>
+        <p:txBody>
+          <a:bodyPr wrap="square" lIns="0" tIns="0" rIns="0" bIns="0" rtlCol="0" anchor="t"/>
+          <a:lstStyle/>
+          <a:p>
+            <a:pPr indent="0" marL="0">
+              <a:buNone/>
+            </a:pPr>
+            <a:r>
+              <a:rPr lang="en-US" sz="1500" dirty="0">
+                <a:solidFill>
+                  <a:schemeClr val="accent6"/>
+                </a:solidFill>
+                <a:latin typeface="Calibri" pitchFamily="34" charset="0"/>
+                <a:ea typeface="Calibri" pitchFamily="34" charset="-122"/>
+                <a:cs typeface="Calibri" pitchFamily="34" charset="-120"/>
+              </a:rPr>
+              <a:t>Capture fournie par l'utilisateur, anonymisée. Le brouillon confirmé est persisté en attente, sans annonce publiée.</a:t>
+            </a:r>
+            <a:endParaRPr lang="en-US" sz="1300" dirty="0"/>
+          </a:p>
+        </p:txBody>
+      </p:sp>
+      <p:sp>
+        <p:nvSpPr>
+          <p:cNvPr id="25" name="Slide Number Placeholder 0"/>
+          <p:cNvSpPr>
+            <a:spLocks noGrp="1"/>
+          </p:cNvSpPr>
+          <p:nvPr>
+            <p:ph type="sldNum" sz="quarter" idx="4294967295"/>
+          </p:nvPr>
+        </p:nvSpPr>
+        <p:spPr>
+          <a:xfrm>
+            <a:off x="11094415" y="6400800"/>
+            <a:ext cx="548640" cy="274320"/>
+          </a:xfrm>
+          <a:prstGeom prst="rect">
+            <a:avLst/>
+          </a:prstGeom>
+          <a:extLst>
+            <a:ext uri="{C572A759-6A51-4108-AA02-DFA0A04FC94B}">
+              <ns3:wrappingTextBoxFlag val="0"/>
+            </a:ext>
+          </a:extLst>
+        </p:spPr>
+        <p:txBody>
+          <a:bodyPr/>
+          <a:lstStyle>
+            <a:lvl1pPr>
+              <a:defRPr sz="1000">
+                <a:solidFill>
+                  <a:schemeClr val="accent6"/>
+                </a:solidFill>
+                <a:latin typeface="Calibri"/>
+                <a:ea typeface="Calibri"/>
+                <a:cs typeface="Calibri"/>
+              </a:defRPr>
+            </a:lvl1pPr>
+          </a:lstStyle>
+          <a:p>
+            <a:pPr algn="r"/>
+            <a:fld id="{F7021451-1387-4CA6-816F-3879F97B5CBC}" type="slidenum">
+              <a:rPr b="0" lang="en-US"/>
+              <a:t>10</a:t>
+            </a:fld>
+            <a:endParaRPr lang="en-US"/>
+          </a:p>
+        </p:txBody>
+      </p:sp>
+    </p:spTree>
+  </p:cSld>
+  <p:clrMapOvr>
+    <a:masterClrMapping/>
+  </p:clrMapOvr>
+</p:sld>
+</file>
+
+<file path=ppt/slides/slide13.xml><?xml version="1.0" encoding="utf-8"?>
+<p:sld xmlns:a="http://schemas.openxmlformats.org/drawingml/2006/main" xmlns:ns3="http://schemas.microsoft.com/office/mac/drawingml/2011/main" xmlns:p="http://schemas.openxmlformats.org/presentationml/2006/main" xmlns:r="http://schemas.openxmlformats.org/officeDocument/2006/relationships">
+  <p:cSld name="Slide 9">
+    <p:spTree>
+      <p:nvGrpSpPr>
+        <p:cNvPr id="1" name=""/>
+        <p:cNvGrpSpPr/>
+        <p:nvPr/>
+      </p:nvGrpSpPr>
+      <p:grpSpPr>
+        <a:xfrm>
+          <a:off x="0" y="0"/>
+          <a:ext cx="0" cy="0"/>
+          <a:chOff x="0" y="0"/>
+          <a:chExt cx="0" cy="0"/>
+        </a:xfrm>
+      </p:grpSpPr>
+      <p:sp>
+        <p:nvSpPr>
+          <p:cNvPr id="2" name="Text 0"/>
+          <p:cNvSpPr/>
+          <p:nvPr>
+            <p:ph idx="100" type="title" hasCustomPrompt="1"/>
+          </p:nvPr>
+        </p:nvSpPr>
+        <p:spPr>
+          <a:xfrm>
+            <a:off x="548640" y="411480"/>
+            <a:ext cx="11094415" cy="822960"/>
+          </a:xfrm>
+          <a:prstGeom prst="rect">
+            <a:avLst/>
+          </a:prstGeom>
+          <a:noFill/>
+          <a:ln/>
+        </p:spPr>
+        <p:txBody>
+          <a:bodyPr wrap="square" lIns="0" tIns="0" rIns="0" bIns="0" rtlCol="0" anchor="ctr"/>
+          <a:lstStyle/>
+          <a:p>
+            <a:pPr algn="l" indent="0" marL="0">
+              <a:buNone/>
+            </a:pPr>
+            <a:r>
+              <a:rPr lang="en-US" sz="3400" b="1" dirty="0">
+                <a:solidFill>
+                  <a:schemeClr val="tx1"/>
+                </a:solidFill>
+                <a:latin typeface="Arial" pitchFamily="34" charset="0"/>
+                <a:ea typeface="Arial" pitchFamily="34" charset="-122"/>
+                <a:cs typeface="Arial" pitchFamily="34" charset="-120"/>
+              </a:rPr>
+              <a:t>Validation admin avant publication</a:t>
+            </a:r>
+            <a:endParaRPr lang="en-US" sz="3400" dirty="0"/>
+          </a:p>
+        </p:txBody>
+      </p:sp>
+      <p:pic>
+        <p:nvPicPr>
+          <p:cNvPr id="3" name="Résultats de recherche" descr="Résultats de Kwatsur : carte d'annonce avec photo d'exemple étiquetée, loyer et équipements">    </p:cNvPr>
+          <p:cNvPicPr>
+            <a:picLocks noChangeAspect="1"/>
+          </p:cNvPicPr>
+          <p:nvPr/>
+        </p:nvPicPr>
+        <p:blipFill>
+          <a:blip r:embed="rId1"/>
+          <a:stretch>
+            <a:fillRect/>
+          </a:stretch>
+        </p:blipFill>
+        <p:spPr>
+          <a:xfrm>
+            <a:off x="548640" y="1270000"/>
+            <a:ext cx="11094415" cy="4250000"/>
+          </a:xfrm>
+          <a:prstGeom prst="rect">
+            <a:avLst/>
+          </a:prstGeom>
+        </p:spPr>
+      </p:pic>
+      <p:sp>
+        <p:nvSpPr>
+          <p:cNvPr id="5" name="Text 1"/>
+          <p:cNvSpPr txBox="1"/>
+          <p:nvPr/>
+        </p:nvSpPr>
+        <p:spPr>
+          <a:xfrm>
+            <a:off x="548640" y="5580000"/>
+            <a:ext cx="11094415" cy="640080"/>
+          </a:xfrm>
+          <a:prstGeom prst="rect">
+            <a:avLst/>
+          </a:prstGeom>
+          <a:noFill/>
+          <a:ln/>
+        </p:spPr>
+        <p:txBody>
+          <a:bodyPr wrap="square" lIns="0" tIns="0" rIns="0" bIns="0" rtlCol="0" anchor="t"/>
+          <a:lstStyle/>
+          <a:p>
+            <a:pPr indent="0" marL="0">
+              <a:buNone/>
+            </a:pPr>
+            <a:r>
+              <a:rPr lang="en-US" sz="1500" dirty="0">
+                <a:solidFill>
+                  <a:schemeClr val="accent6"/>
+                </a:solidFill>
+                <a:latin typeface="Calibri" pitchFamily="34" charset="0"/>
+                <a:ea typeface="Calibri" pitchFamily="34" charset="-122"/>
+                <a:cs typeface="Calibri" pitchFamily="34" charset="-120"/>
+              </a:rPr>
+              <a:t>Capture fournie par l'utilisateur, anonymisée. Proposition en attente, note et boutons approuver/refuser. Approbation couverte hors réseau, pas de publication réelle montrée.</a:t>
+            </a:r>
+            <a:endParaRPr lang="en-US" sz="1300" dirty="0"/>
+          </a:p>
+        </p:txBody>
+      </p:sp>
+      <p:sp>
+        <p:nvSpPr>
+          <p:cNvPr id="25" name="Slide Number Placeholder 0"/>
+          <p:cNvSpPr>
+            <a:spLocks noGrp="1"/>
+          </p:cNvSpPr>
+          <p:nvPr>
+            <p:ph type="sldNum" sz="quarter" idx="4294967295"/>
+          </p:nvPr>
+        </p:nvSpPr>
+        <p:spPr>
+          <a:xfrm>
+            <a:off x="11094415" y="6400800"/>
+            <a:ext cx="548640" cy="274320"/>
+          </a:xfrm>
+          <a:prstGeom prst="rect">
+            <a:avLst/>
+          </a:prstGeom>
+          <a:extLst>
+            <a:ext uri="{C572A759-6A51-4108-AA02-DFA0A04FC94B}">
+              <ns3:wrappingTextBoxFlag val="0"/>
+            </a:ext>
+          </a:extLst>
+        </p:spPr>
+        <p:txBody>
+          <a:bodyPr/>
+          <a:lstStyle>
+            <a:lvl1pPr>
+              <a:defRPr sz="1000">
+                <a:solidFill>
+                  <a:schemeClr val="accent6"/>
+                </a:solidFill>
+                <a:latin typeface="Calibri"/>
+                <a:ea typeface="Calibri"/>
+                <a:cs typeface="Calibri"/>
+              </a:defRPr>
+            </a:lvl1pPr>
+          </a:lstStyle>
+          <a:p>
+            <a:pPr algn="r"/>
+            <a:fld id="{F7021451-1387-4CA6-816F-3879F97B5CBC}" type="slidenum">
+              <a:rPr b="0" lang="en-US"/>
+              <a:t>11</a:t>
+            </a:fld>
+            <a:endParaRPr lang="en-US"/>
           </a:p>
         </p:txBody>
       </p:sp>
@@ -4425,7 +4781,7 @@
 </file>
 
 <file path=ppt/slides/slide3.xml><?xml version="1.0" encoding="utf-8"?>
-<p:sld xmlns:a="http://schemas.openxmlformats.org/drawingml/2006/main" xmlns:r="http://schemas.openxmlformats.org/officeDocument/2006/relationships" xmlns:p="http://schemas.openxmlformats.org/presentationml/2006/main">
+<p:sld xmlns:a="http://schemas.openxmlformats.org/drawingml/2006/main" xmlns:ns3="http://schemas.microsoft.com/office/mac/drawingml/2011/main" xmlns:p="http://schemas.openxmlformats.org/presentationml/2006/main" xmlns:r="http://schemas.openxmlformats.org/officeDocument/2006/relationships">
   <p:cSld name="Slide 3">
     <p:spTree>
       <p:nvGrpSpPr>
@@ -4740,7 +5096,7 @@
                 <a:ea typeface="Calibri" pitchFamily="34" charset="-122"/>
                 <a:cs typeface="Calibri" pitchFamily="34" charset="-120"/>
               </a:rPr>
-              <a:t>Comparaison et questions sur une annonce</a:t>
+              <a:t>Résultats et comparaison dans un panneau repliable</a:t>
             </a:r>
             <a:endParaRPr lang="en-US" sz="1600" dirty="0"/>
           </a:p>
@@ -4828,7 +5184,7 @@
                 <a:ea typeface="Calibri" pitchFamily="34" charset="-122"/>
                 <a:cs typeface="Calibri" pitchFamily="34" charset="-120"/>
               </a:rPr>
-              <a:t>Photo réelle ou illustration IA d'une pièce</a:t>
+              <a:t>Images sur demande : photo, exemple crédité ou IA</a:t>
             </a:r>
             <a:endParaRPr lang="en-US" sz="1600" dirty="0"/>
           </a:p>
@@ -4916,7 +5272,7 @@
                 <a:ea typeface="Calibri" pitchFamily="34" charset="-122"/>
                 <a:cs typeface="Calibri" pitchFamily="34" charset="-120"/>
               </a:rPr>
-              <a:t>Dépôt d'annonce validé par un administrateur</a:t>
+              <a:t>Proposition persistée, puis décision administrateur</a:t>
             </a:r>
             <a:endParaRPr lang="en-US" sz="1600" dirty="0"/>
           </a:p>
@@ -5067,7 +5423,7 @@
                 <a:ea typeface="Calibri" pitchFamily="34" charset="-122"/>
                 <a:cs typeface="Calibri" pitchFamily="34" charset="-120"/>
               </a:rPr>
-              <a:t>Capture réelle : réponse de Nemotron via Meterless, annonces lues via Zetaris, trace Scout, puis paiement refusé.</a:t>
+              <a:t>Capture historique : recherche et garde Scout. Les images du chat sont désormais uniquement sur demande.</a:t>
             </a:r>
             <a:endParaRPr lang="en-US" sz="1200" dirty="0"/>
           </a:p>
@@ -5166,7 +5522,7 @@
           </a:prstGeom>
           <a:extLst>
             <a:ext uri="{C572A759-6A51-4108-AA02-DFA0A04FC94B}">
-              <ma14:wrappingTextBoxFlag xmlns:ma14="http://schemas.microsoft.com/office/mac/drawingml/2011/main" val="0"/>
+              <ns3:wrappingTextBoxFlag val="0"/>
             </a:ext>
           </a:extLst>
         </p:spPr>
@@ -5203,7 +5559,7 @@
 </file>
 
 <file path=ppt/slides/slide4.xml><?xml version="1.0" encoding="utf-8"?>
-<p:sld xmlns:a="http://schemas.openxmlformats.org/drawingml/2006/main" xmlns:r="http://schemas.openxmlformats.org/officeDocument/2006/relationships" xmlns:p="http://schemas.openxmlformats.org/presentationml/2006/main">
+<p:sld xmlns:a="http://schemas.openxmlformats.org/drawingml/2006/main" xmlns:ns2="http://schemas.microsoft.com/office/mac/drawingml/2011/main" xmlns:p="http://schemas.openxmlformats.org/presentationml/2006/main">
   <p:cSld name="Slide 4">
     <p:spTree>
       <p:nvGrpSpPr>
@@ -5405,7 +5761,7 @@
                 <a:ea typeface="Calibri" pitchFamily="34" charset="-122"/>
                 <a:cs typeface="Calibri" pitchFamily="34" charset="-120"/>
               </a:rPr>
-              <a:t>Intention, garde, contrat signé</a:t>
+              <a:t>Garde, contrat ; routage simplifié par défaut</a:t>
             </a:r>
             <a:endParaRPr lang="en-US" sz="1300" dirty="0"/>
           </a:p>
@@ -5757,7 +6113,7 @@
                 <a:ea typeface="Calibri" pitchFamily="34" charset="-122"/>
                 <a:cs typeface="Calibri" pitchFamily="34" charset="-120"/>
               </a:rPr>
-              <a:t>Annonces en SQL (API REST)</a:t>
+              <a:t>SQL via API ; repli PostgreSQL annoncé</a:t>
             </a:r>
             <a:endParaRPr lang="en-US" sz="1300" dirty="0"/>
           </a:p>
@@ -6285,7 +6641,7 @@
                 <a:ea typeface="Calibri" pitchFamily="34" charset="-122"/>
                 <a:cs typeface="Calibri" pitchFamily="34" charset="-120"/>
               </a:rPr>
-              <a:t>Cartes, images, voix</a:t>
+              <a:t>Cartes repliables, images demandées, voix</a:t>
             </a:r>
             <a:endParaRPr lang="en-US" sz="1300" dirty="0"/>
           </a:p>
@@ -6383,7 +6739,7 @@
                 <a:ea typeface="Calibri" pitchFamily="34" charset="-122"/>
                 <a:cs typeface="Calibri" pitchFamily="34" charset="-120"/>
               </a:rPr>
-              <a:t>Chaque réponse porte sa trace : intention, contrat, outils, modèle (nvidia/nemotron-3-ultra-550b-a55b), source (Zetaris).</a:t>
+              <a:t>La réponse expose sa provenance : modèle ou gabarit, source réellement utilisée, trace Scout si applicable.</a:t>
             </a:r>
             <a:endParaRPr lang="en-US" sz="1500" dirty="0"/>
           </a:p>
@@ -6430,7 +6786,7 @@
           </a:prstGeom>
           <a:extLst>
             <a:ext uri="{C572A759-6A51-4108-AA02-DFA0A04FC94B}">
-              <ma14:wrappingTextBoxFlag xmlns:ma14="http://schemas.microsoft.com/office/mac/drawingml/2011/main" val="0"/>
+              <ns2:wrappingTextBoxFlag val="0"/>
             </a:ext>
           </a:extLst>
         </p:spPr>
@@ -6467,7 +6823,7 @@
 </file>
 
 <file path=ppt/slides/slide5.xml><?xml version="1.0" encoding="utf-8"?>
-<p:sld xmlns:a="http://schemas.openxmlformats.org/drawingml/2006/main" xmlns:r="http://schemas.openxmlformats.org/officeDocument/2006/relationships" xmlns:p="http://schemas.openxmlformats.org/presentationml/2006/main">
+<p:sld xmlns:a="http://schemas.openxmlformats.org/drawingml/2006/main" xmlns:ns3="http://schemas.microsoft.com/office/mac/drawingml/2011/main" xmlns:p="http://schemas.openxmlformats.org/presentationml/2006/main" xmlns:r="http://schemas.openxmlformats.org/officeDocument/2006/relationships">
   <p:cSld name="Slide 5">
     <p:spTree>
       <p:nvGrpSpPr>
@@ -7001,7 +7357,7 @@
                 <a:ea typeface="Calibri" pitchFamily="34" charset="-122"/>
                 <a:cs typeface="Calibri" pitchFamily="34" charset="-120"/>
               </a:rPr>
-              <a:t>Meterless Scout Intent (Python) · Cursor et Claude Code · 148 tests</a:t>
+              <a:t>Scout Intent (Python) · Cursor et Claude Code · 214 réussis, 2 ignorés</a:t>
             </a:r>
             <a:endParaRPr lang="en-US" sz="1400" dirty="0"/>
           </a:p>
@@ -7510,7 +7866,7 @@
           </a:prstGeom>
           <a:extLst>
             <a:ext uri="{C572A759-6A51-4108-AA02-DFA0A04FC94B}">
-              <ma14:wrappingTextBoxFlag xmlns:ma14="http://schemas.microsoft.com/office/mac/drawingml/2011/main" val="0"/>
+              <ns3:wrappingTextBoxFlag val="0"/>
             </a:ext>
           </a:extLst>
         </p:spPr>
@@ -7547,7 +7903,7 @@
 </file>
 
 <file path=ppt/slides/slide6.xml><?xml version="1.0" encoding="utf-8"?>
-<p:sld xmlns:a="http://schemas.openxmlformats.org/drawingml/2006/main" xmlns:r="http://schemas.openxmlformats.org/officeDocument/2006/relationships" xmlns:p="http://schemas.openxmlformats.org/presentationml/2006/main">
+<p:sld xmlns:a="http://schemas.openxmlformats.org/drawingml/2006/main" xmlns:ns2="http://schemas.microsoft.com/office/mac/drawingml/2011/main" xmlns:p="http://schemas.openxmlformats.org/presentationml/2006/main">
   <p:cSld name="Slide 6">
     <p:spTree>
       <p:nvGrpSpPr>
@@ -7710,7 +8066,7 @@
                 <a:ea typeface="Calibri" pitchFamily="34" charset="-122"/>
                 <a:cs typeface="Calibri" pitchFamily="34" charset="-120"/>
               </a:rPr>
-              <a:t>chaque recherche</a:t>
+              <a:t>source configurée</a:t>
             </a:r>
             <a:endParaRPr lang="en-US" sz="1300" dirty="0"/>
           </a:p>
@@ -8164,7 +8520,7 @@
                 <a:ea typeface="Calibri" pitchFamily="34" charset="-122"/>
                 <a:cs typeface="Calibri" pitchFamily="34" charset="-120"/>
               </a:rPr>
-              <a:t>Unique point d'accès aux annonces : chat comme recherche par filtres interrogent Zetaris en SQL.</a:t>
+              <a:t>Source principale configurée : chat et filtres interrogent Zetaris, ou PostgreSQL en repli visible.</a:t>
             </a:r>
             <a:endParaRPr lang="en-US" sz="1600" dirty="0"/>
           </a:p>
@@ -8206,7 +8562,7 @@
                 <a:ea typeface="Calibri" pitchFamily="34" charset="-122"/>
                 <a:cs typeface="Calibri" pitchFamily="34" charset="-120"/>
               </a:rPr>
-              <a:t>Les annonces déposées dans le chat puis validées apparaissent aussitôt dans les recherches via Zetaris.</a:t>
+              <a:t>Une approbation publie dans PostgreSQL ; la vue fédérée expose les annonces approuvées.</a:t>
             </a:r>
             <a:endParaRPr lang="en-US" sz="1600" dirty="0"/>
           </a:p>
@@ -8248,7 +8604,7 @@
                 <a:ea typeface="Calibri" pitchFamily="34" charset="-122"/>
                 <a:cs typeface="Calibri" pitchFamily="34" charset="-120"/>
               </a:rPr>
-              <a:t>Preuve : statut live « zetaris : ok », data_source = zetaris dans chaque réponse, journaux HTTP 200.</a:t>
+              <a:t>Preuves historiques HTTP 200. Derniers essais : erreur Zetaris, repli PostgreSQL annoncé.</a:t>
             </a:r>
             <a:endParaRPr lang="en-US" sz="1600" dirty="0"/>
           </a:p>
@@ -8274,7 +8630,7 @@
           </a:prstGeom>
           <a:extLst>
             <a:ext uri="{C572A759-6A51-4108-AA02-DFA0A04FC94B}">
-              <ma14:wrappingTextBoxFlag xmlns:ma14="http://schemas.microsoft.com/office/mac/drawingml/2011/main" val="0"/>
+              <ns2:wrappingTextBoxFlag val="0"/>
             </a:ext>
           </a:extLst>
         </p:spPr>
@@ -8311,7 +8667,7 @@
 </file>
 
 <file path=ppt/slides/slide7.xml><?xml version="1.0" encoding="utf-8"?>
-<p:sld xmlns:a="http://schemas.openxmlformats.org/drawingml/2006/main" xmlns:r="http://schemas.openxmlformats.org/officeDocument/2006/relationships" xmlns:p="http://schemas.openxmlformats.org/presentationml/2006/main">
+<p:sld xmlns:a="http://schemas.openxmlformats.org/drawingml/2006/main" xmlns:ns2="http://schemas.microsoft.com/office/mac/drawingml/2011/main" xmlns:p="http://schemas.openxmlformats.org/presentationml/2006/main">
   <p:cSld name="Slide 7">
     <p:spTree>
       <p:nvGrpSpPr>
@@ -8770,7 +9126,7 @@
                 <a:ea typeface="Calibri" pitchFamily="34" charset="-122"/>
                 <a:cs typeface="Calibri" pitchFamily="34" charset="-120"/>
               </a:rPr>
-              <a:t>Avant chaque action : intention parmi 7, garde en 5 couches (injection, paiement interdit, portée, données personnelles, débit).</a:t>
+              <a:t>Défaut : routage simplifié, recherche fractionnée, dépôt et images explicites. Comparaison/contact chat : activer Scout complet.</a:t>
             </a:r>
             <a:endParaRPr lang="en-US" sz="1600" dirty="0"/>
           </a:p>
@@ -9304,7 +9660,7 @@
                 <a:ea typeface="Calibri" pitchFamily="34" charset="-122"/>
                 <a:cs typeface="Calibri" pitchFamily="34" charset="-120"/>
               </a:rPr>
-              <a:t>Évaluation sur les seuils officiels de Meterless (thresholds.yaml) : 59 intentions, 22 cas d'injection dont les 10 officiels, 6 cas limites.</a:t>
+              <a:t>Mesures historiques du mode Scout complet : 59 intentions, 22 injections, 6 cas limites ; seuils officiels Meterless.</a:t>
             </a:r>
             <a:endParaRPr lang="en-US" sz="1200" dirty="0"/>
           </a:p>
@@ -9330,7 +9686,7 @@
           </a:prstGeom>
           <a:extLst>
             <a:ext uri="{C572A759-6A51-4108-AA02-DFA0A04FC94B}">
-              <ma14:wrappingTextBoxFlag xmlns:ma14="http://schemas.microsoft.com/office/mac/drawingml/2011/main" val="0"/>
+              <ns2:wrappingTextBoxFlag val="0"/>
             </a:ext>
           </a:extLst>
         </p:spPr>
@@ -9367,7 +9723,7 @@
 </file>
 
 <file path=ppt/slides/slide8.xml><?xml version="1.0" encoding="utf-8"?>
-<p:sld xmlns:a="http://schemas.openxmlformats.org/drawingml/2006/main" xmlns:r="http://schemas.openxmlformats.org/officeDocument/2006/relationships" xmlns:p="http://schemas.openxmlformats.org/presentationml/2006/main">
+<p:sld xmlns:a="http://schemas.openxmlformats.org/drawingml/2006/main" xmlns:ns3="http://schemas.microsoft.com/office/mac/drawingml/2011/main" xmlns:p="http://schemas.openxmlformats.org/presentationml/2006/main" xmlns:r="http://schemas.openxmlformats.org/officeDocument/2006/relationships">
   <p:cSld name="Slide 8">
     <p:spTree>
       <p:nvGrpSpPr>
@@ -9418,7 +9774,7 @@
                 <a:ea typeface="Arial" pitchFamily="34" charset="-122"/>
                 <a:cs typeface="Arial" pitchFamily="34" charset="-120"/>
               </a:rPr>
-              <a:t>Ce qui rend notre usage unique</a:t>
+              <a:t>Images maîtrisées et propositions modérées</a:t>
             </a:r>
             <a:endParaRPr lang="en-US" sz="3400" dirty="0"/>
           </a:p>
@@ -9540,7 +9896,7 @@
                 <a:ea typeface="Arial" pitchFamily="34" charset="-122"/>
                 <a:cs typeface="Arial" pitchFamily="34" charset="-120"/>
               </a:rPr>
-              <a:t>Scout comme garde-fou réel</a:t>
+              <a:t>Images uniquement sur demande</a:t>
             </a:r>
             <a:endParaRPr lang="en-US" sz="1900" dirty="0"/>
           </a:p>
@@ -9579,7 +9935,7 @@
                 <a:ea typeface="Calibri" pitchFamily="34" charset="-122"/>
                 <a:cs typeface="Calibri" pitchFamily="34" charset="-120"/>
               </a:rPr>
-              <a:t>Aucun outil sans contrat signé ; l'arnaque « envoie la caution par Orange Money » est bloquée avant tout appel au modèle.</a:t>
+              <a:t>Cible nommée respectée ; ambiguïté : clarification. Photo propriétaire, exemple crédité, illustration réutilisée, puis génération.</a:t>
             </a:r>
             <a:endParaRPr lang="en-US" sz="1400" dirty="0"/>
           </a:p>
@@ -9701,7 +10057,7 @@
                 <a:ea typeface="Arial" pitchFamily="34" charset="-122"/>
                 <a:cs typeface="Arial" pitchFamily="34" charset="-120"/>
               </a:rPr>
-              <a:t>Zetaris sur une base vivante</a:t>
+              <a:t>Contexte camerounais</a:t>
             </a:r>
             <a:endParaRPr lang="en-US" sz="1900" dirty="0"/>
           </a:p>
@@ -9740,7 +10096,7 @@
                 <a:ea typeface="Calibri" pitchFamily="34" charset="-122"/>
                 <a:cs typeface="Calibri" pitchFamily="34" charset="-120"/>
               </a:rPr>
-              <a:t>Les annonces des propriétaires, validées, rejoignent la couche de données sans changer l'agent.</a:t>
+              <a:t>Prompt documentaire Douala/Yaoundé, faits prioritaires, 2048 caractères. Illustration IA étiquetée ; aucune authenticité garantie.</a:t>
             </a:r>
             <a:endParaRPr lang="en-US" sz="1400" dirty="0"/>
           </a:p>
@@ -9862,7 +10218,7 @@
                 <a:ea typeface="Arial" pitchFamily="34" charset="-122"/>
                 <a:cs typeface="Arial" pitchFamily="34" charset="-120"/>
               </a:rPr>
-              <a:t>Nemotron qui n'invente rien</a:t>
+              <a:t>Dépôt en attente</a:t>
             </a:r>
             <a:endParaRPr lang="en-US" sz="1900" dirty="0"/>
           </a:p>
@@ -9901,7 +10257,7 @@
                 <a:ea typeface="Calibri" pitchFamily="34" charset="-122"/>
                 <a:cs typeface="Calibri" pitchFamily="34" charset="-120"/>
               </a:rPr>
-              <a:t>Il ne voit que des faits calculés ; quand une information manque, il le dit et conseille de la demander.</a:t>
+              <a:t>Brouillon puis confirmation : pending en base. Admin authentifié : détails, photos, note, approbation ou refus, filtres et déconnexion.</a:t>
             </a:r>
             <a:endParaRPr lang="en-US" sz="1400" dirty="0"/>
           </a:p>
@@ -10023,7 +10379,7 @@
                 <a:ea typeface="Arial" pitchFamily="34" charset="-122"/>
                 <a:cs typeface="Arial" pitchFamily="34" charset="-120"/>
               </a:rPr>
-              <a:t>Démo fiable</a:t>
+              <a:t>Vérifications distinguées</a:t>
             </a:r>
             <a:endParaRPr lang="en-US" sz="1900" dirty="0"/>
           </a:p>
@@ -10062,7 +10418,7 @@
                 <a:ea typeface="Calibri" pitchFamily="34" charset="-122"/>
                 <a:cs typeface="Calibri" pitchFamily="34" charset="-120"/>
               </a:rPr>
-              <a:t>Tout vérifié en réel ; SAMPLE_MODE fait tourner le parcours sans aucun service externe.</a:t>
+              <a:t>Dépôt et refus testés en réel ; approbation et photos hors réseau. 214 tests réussis, 2 ignorés. Quota global UTC ; réutilisation gratuite.</a:t>
             </a:r>
             <a:endParaRPr lang="en-US" sz="1400" dirty="0"/>
           </a:p>
@@ -10088,7 +10444,7 @@
           </a:prstGeom>
           <a:extLst>
             <a:ext uri="{C572A759-6A51-4108-AA02-DFA0A04FC94B}">
-              <ma14:wrappingTextBoxFlag xmlns:ma14="http://schemas.microsoft.com/office/mac/drawingml/2011/main" val="0"/>
+              <ns3:wrappingTextBoxFlag val="0"/>
             </a:ext>
           </a:extLst>
         </p:spPr>
@@ -10125,7 +10481,7 @@
 </file>
 
 <file path=ppt/slides/slide9.xml><?xml version="1.0" encoding="utf-8"?>
-<p:sld xmlns:a="http://schemas.openxmlformats.org/drawingml/2006/main" xmlns:r="http://schemas.openxmlformats.org/officeDocument/2006/relationships" xmlns:p="http://schemas.openxmlformats.org/presentationml/2006/main">
+<p:sld xmlns:a="http://schemas.openxmlformats.org/drawingml/2006/main" xmlns:ns3="http://schemas.microsoft.com/office/mac/drawingml/2011/main" xmlns:p="http://schemas.openxmlformats.org/presentationml/2006/main" xmlns:r="http://schemas.openxmlformats.org/officeDocument/2006/relationships">
   <p:cSld name="Slide 9">
     <p:spTree>
       <p:nvGrpSpPr>
@@ -10176,7 +10532,7 @@
                 <a:ea typeface="Arial" pitchFamily="34" charset="-122"/>
                 <a:cs typeface="Arial" pitchFamily="34" charset="-120"/>
               </a:rPr>
-              <a:t>Le produit en images</a:t>
+              <a:t>Recherche et images : captures historiques</a:t>
             </a:r>
             <a:endParaRPr lang="en-US" sz="3400" dirty="0"/>
           </a:p>
@@ -10263,7 +10619,7 @@
                 <a:ea typeface="Calibri" pitchFamily="34" charset="-122"/>
                 <a:cs typeface="Calibri" pitchFamily="34" charset="-120"/>
               </a:rPr>
-              <a:t>Résultats : photo d'exemple créditée, loyer, équipements ; une information inconnue reste « non renseignée ».</a:t>
+              <a:t>Photo d'exemple créditée sur une annonce fictive. Aujourd'hui, ouvrir le panneau de résultats, replié par défaut.</a:t>
             </a:r>
             <a:endParaRPr lang="en-US" sz="1300" dirty="0"/>
           </a:p>
@@ -10302,7 +10658,7 @@
                 <a:ea typeface="Calibri" pitchFamily="34" charset="-122"/>
                 <a:cs typeface="Calibri" pitchFamily="34" charset="-120"/>
               </a:rPr>
-              <a:t>Illustration IA d'un salon (Cloudflare FLUX), guidée par la vision et le contexte camerounais, toujours étiquetée.</a:t>
+              <a:t>Illustration historique Cloudflare, pas une photo du logement. Désormais uniquement sur demande explicite ; métadonnées, pas pixels, pour Nemotron.</a:t>
             </a:r>
             <a:endParaRPr lang="en-US" sz="1300" dirty="0"/>
           </a:p>
@@ -10328,7 +10684,7 @@
           </a:prstGeom>
           <a:extLst>
             <a:ext uri="{C572A759-6A51-4108-AA02-DFA0A04FC94B}">
-              <ma14:wrappingTextBoxFlag xmlns:ma14="http://schemas.microsoft.com/office/mac/drawingml/2011/main" val="0"/>
+              <ns3:wrappingTextBoxFlag val="0"/>
             </a:ext>
           </a:extLst>
         </p:spPr>
